--- a/ppt/IoTAI26-RNN.pptx
+++ b/ppt/IoTAI26-RNN.pptx
@@ -5,10 +5,10 @@
     <p:sldMasterId id="2147483653" r:id="rId1"/>
   </p:sldMasterIdLst>
   <p:notesMasterIdLst>
-    <p:notesMasterId r:id="rId22"/>
+    <p:notesMasterId r:id="rId27"/>
   </p:notesMasterIdLst>
   <p:handoutMasterIdLst>
-    <p:handoutMasterId r:id="rId23"/>
+    <p:handoutMasterId r:id="rId28"/>
   </p:handoutMasterIdLst>
   <p:sldIdLst>
     <p:sldId id="264" r:id="rId2"/>
@@ -31,6 +31,11 @@
     <p:sldId id="279" r:id="rId19"/>
     <p:sldId id="280" r:id="rId20"/>
     <p:sldId id="281" r:id="rId21"/>
+    <p:sldId id="286" r:id="rId22"/>
+    <p:sldId id="287" r:id="rId23"/>
+    <p:sldId id="288" r:id="rId24"/>
+    <p:sldId id="289" r:id="rId25"/>
+    <p:sldId id="290" r:id="rId26"/>
   </p:sldIdLst>
   <p:sldSz cx="9144000" cy="6858000" type="screen4x3"/>
   <p:notesSz cx="6648450" cy="9782175"/>
@@ -5142,6 +5147,568 @@
     <p:extLst>
       <p:ext uri="{BB962C8B-B14F-4D97-AF65-F5344CB8AC3E}">
         <p14:creationId xmlns:p14="http://schemas.microsoft.com/office/powerpoint/2010/main" val="3000630258"/>
+      </p:ext>
+    </p:extLst>
+  </p:cSld>
+  <p:clrMapOvr>
+    <a:masterClrMapping/>
+  </p:clrMapOvr>
+</p:sld>
+</file>
+
+<file path=ppt/slides/slide21.xml><?xml version="1.0" encoding="utf-8"?>
+<p:sld xmlns:a="http://schemas.openxmlformats.org/drawingml/2006/main" xmlns:r="http://schemas.openxmlformats.org/officeDocument/2006/relationships" xmlns:p="http://schemas.openxmlformats.org/presentationml/2006/main">
+  <p:cSld>
+    <p:spTree>
+      <p:nvGrpSpPr>
+        <p:cNvPr id="1" name=""/>
+        <p:cNvGrpSpPr/>
+        <p:nvPr/>
+      </p:nvGrpSpPr>
+      <p:grpSpPr>
+        <a:xfrm>
+          <a:off x="0" y="0"/>
+          <a:ext cx="0" cy="0"/>
+          <a:chOff x="0" y="0"/>
+          <a:chExt cx="0" cy="0"/>
+        </a:xfrm>
+      </p:grpSpPr>
+      <p:sp>
+        <p:nvSpPr>
+          <p:cNvPr id="2" name="Titre 1">
+            <a:extLst>
+              <a:ext uri="{FF2B5EF4-FFF2-40B4-BE49-F238E27FC236}">
+                <a16:creationId xmlns:a16="http://schemas.microsoft.com/office/drawing/2014/main" id="{C20B2ADD-DFA2-CDEB-DA16-CAE08248DBE2}"/>
+              </a:ext>
+            </a:extLst>
+          </p:cNvPr>
+          <p:cNvSpPr>
+            <a:spLocks noGrp="1"/>
+          </p:cNvSpPr>
+          <p:nvPr>
+            <p:ph type="title"/>
+          </p:nvPr>
+        </p:nvSpPr>
+        <p:spPr/>
+        <p:txBody>
+          <a:bodyPr/>
+          <a:lstStyle/>
+          <a:p>
+            <a:r>
+              <a:rPr lang="fr-FR" dirty="0"/>
+              <a:t>Modèles mixtes</a:t>
+            </a:r>
+          </a:p>
+        </p:txBody>
+      </p:sp>
+      <p:sp>
+        <p:nvSpPr>
+          <p:cNvPr id="3" name="Espace réservé du contenu 2">
+            <a:extLst>
+              <a:ext uri="{FF2B5EF4-FFF2-40B4-BE49-F238E27FC236}">
+                <a16:creationId xmlns:a16="http://schemas.microsoft.com/office/drawing/2014/main" id="{6D6F84F1-F941-918B-4608-04BECF6D17E9}"/>
+              </a:ext>
+            </a:extLst>
+          </p:cNvPr>
+          <p:cNvSpPr>
+            <a:spLocks noGrp="1"/>
+          </p:cNvSpPr>
+          <p:nvPr>
+            <p:ph idx="1"/>
+          </p:nvPr>
+        </p:nvSpPr>
+        <p:spPr/>
+        <p:txBody>
+          <a:bodyPr/>
+          <a:lstStyle/>
+          <a:p>
+            <a:r>
+              <a:rPr lang="fr-FR" dirty="0"/>
+              <a:t>Il est possible de mixer les modèles</a:t>
+            </a:r>
+          </a:p>
+          <a:p>
+            <a:pPr lvl="1"/>
+            <a:r>
+              <a:rPr lang="fr-FR" dirty="0"/>
+              <a:t>RNN pour la gestion du temps</a:t>
+            </a:r>
+          </a:p>
+          <a:p>
+            <a:pPr lvl="1"/>
+            <a:r>
+              <a:rPr lang="fr-FR" dirty="0"/>
+              <a:t>Conv1d pour la gestion des fenêtres temporelles</a:t>
+            </a:r>
+          </a:p>
+        </p:txBody>
+      </p:sp>
+    </p:spTree>
+    <p:extLst>
+      <p:ext uri="{BB962C8B-B14F-4D97-AF65-F5344CB8AC3E}">
+        <p14:creationId xmlns:p14="http://schemas.microsoft.com/office/powerpoint/2010/main" val="741150595"/>
+      </p:ext>
+    </p:extLst>
+  </p:cSld>
+  <p:clrMapOvr>
+    <a:masterClrMapping/>
+  </p:clrMapOvr>
+</p:sld>
+</file>
+
+<file path=ppt/slides/slide22.xml><?xml version="1.0" encoding="utf-8"?>
+<p:sld xmlns:a="http://schemas.openxmlformats.org/drawingml/2006/main" xmlns:r="http://schemas.openxmlformats.org/officeDocument/2006/relationships" xmlns:p="http://schemas.openxmlformats.org/presentationml/2006/main">
+  <p:cSld>
+    <p:spTree>
+      <p:nvGrpSpPr>
+        <p:cNvPr id="1" name=""/>
+        <p:cNvGrpSpPr/>
+        <p:nvPr/>
+      </p:nvGrpSpPr>
+      <p:grpSpPr>
+        <a:xfrm>
+          <a:off x="0" y="0"/>
+          <a:ext cx="0" cy="0"/>
+          <a:chOff x="0" y="0"/>
+          <a:chExt cx="0" cy="0"/>
+        </a:xfrm>
+      </p:grpSpPr>
+      <p:sp>
+        <p:nvSpPr>
+          <p:cNvPr id="2" name="Titre 1">
+            <a:extLst>
+              <a:ext uri="{FF2B5EF4-FFF2-40B4-BE49-F238E27FC236}">
+                <a16:creationId xmlns:a16="http://schemas.microsoft.com/office/drawing/2014/main" id="{D2CD824C-E1FF-5839-9475-500AAAC0E049}"/>
+              </a:ext>
+            </a:extLst>
+          </p:cNvPr>
+          <p:cNvSpPr>
+            <a:spLocks noGrp="1"/>
+          </p:cNvSpPr>
+          <p:nvPr>
+            <p:ph type="title"/>
+          </p:nvPr>
+        </p:nvSpPr>
+        <p:spPr/>
+        <p:txBody>
+          <a:bodyPr/>
+          <a:lstStyle/>
+          <a:p>
+            <a:r>
+              <a:rPr lang="fr-FR" dirty="0"/>
+              <a:t>Passive </a:t>
+            </a:r>
+            <a:r>
+              <a:rPr lang="fr-FR" dirty="0" err="1"/>
+              <a:t>Vehicular</a:t>
+            </a:r>
+            <a:r>
+              <a:rPr lang="fr-FR" dirty="0"/>
+              <a:t> </a:t>
+            </a:r>
+            <a:r>
+              <a:rPr lang="fr-FR" dirty="0" err="1"/>
+              <a:t>Sensors</a:t>
+            </a:r>
+            <a:endParaRPr lang="fr-FR" dirty="0"/>
+          </a:p>
+        </p:txBody>
+      </p:sp>
+      <p:sp>
+        <p:nvSpPr>
+          <p:cNvPr id="3" name="Espace réservé du contenu 2">
+            <a:extLst>
+              <a:ext uri="{FF2B5EF4-FFF2-40B4-BE49-F238E27FC236}">
+                <a16:creationId xmlns:a16="http://schemas.microsoft.com/office/drawing/2014/main" id="{F70FD792-503C-006C-BBD0-5899E75476FE}"/>
+              </a:ext>
+            </a:extLst>
+          </p:cNvPr>
+          <p:cNvSpPr>
+            <a:spLocks noGrp="1"/>
+          </p:cNvSpPr>
+          <p:nvPr>
+            <p:ph idx="1"/>
+          </p:nvPr>
+        </p:nvSpPr>
+        <p:spPr/>
+        <p:txBody>
+          <a:bodyPr/>
+          <a:lstStyle/>
+          <a:p>
+            <a:r>
+              <a:rPr lang="fr-FR" dirty="0"/>
+              <a:t>PVS</a:t>
+            </a:r>
+          </a:p>
+          <a:p>
+            <a:r>
+              <a:rPr lang="fr-FR" dirty="0"/>
+              <a:t>Perception intelligente du véhicule basée sur la détection inertielle et l’intelligence artificielle</a:t>
+            </a:r>
+          </a:p>
+        </p:txBody>
+      </p:sp>
+    </p:spTree>
+    <p:extLst>
+      <p:ext uri="{BB962C8B-B14F-4D97-AF65-F5344CB8AC3E}">
+        <p14:creationId xmlns:p14="http://schemas.microsoft.com/office/powerpoint/2010/main" val="1381691940"/>
+      </p:ext>
+    </p:extLst>
+  </p:cSld>
+  <p:clrMapOvr>
+    <a:masterClrMapping/>
+  </p:clrMapOvr>
+</p:sld>
+</file>
+
+<file path=ppt/slides/slide23.xml><?xml version="1.0" encoding="utf-8"?>
+<p:sld xmlns:a="http://schemas.openxmlformats.org/drawingml/2006/main" xmlns:r="http://schemas.openxmlformats.org/officeDocument/2006/relationships" xmlns:p="http://schemas.openxmlformats.org/presentationml/2006/main">
+  <p:cSld>
+    <p:spTree>
+      <p:nvGrpSpPr>
+        <p:cNvPr id="1" name=""/>
+        <p:cNvGrpSpPr/>
+        <p:nvPr/>
+      </p:nvGrpSpPr>
+      <p:grpSpPr>
+        <a:xfrm>
+          <a:off x="0" y="0"/>
+          <a:ext cx="0" cy="0"/>
+          <a:chOff x="0" y="0"/>
+          <a:chExt cx="0" cy="0"/>
+        </a:xfrm>
+      </p:grpSpPr>
+      <p:sp>
+        <p:nvSpPr>
+          <p:cNvPr id="2" name="Titre 1">
+            <a:extLst>
+              <a:ext uri="{FF2B5EF4-FFF2-40B4-BE49-F238E27FC236}">
+                <a16:creationId xmlns:a16="http://schemas.microsoft.com/office/drawing/2014/main" id="{EE111D53-2550-91B1-7262-ACDD40832BFA}"/>
+              </a:ext>
+            </a:extLst>
+          </p:cNvPr>
+          <p:cNvSpPr>
+            <a:spLocks noGrp="1"/>
+          </p:cNvSpPr>
+          <p:nvPr>
+            <p:ph type="title"/>
+          </p:nvPr>
+        </p:nvSpPr>
+        <p:spPr/>
+        <p:txBody>
+          <a:bodyPr/>
+          <a:lstStyle/>
+          <a:p>
+            <a:r>
+              <a:rPr lang="fr-FR" dirty="0"/>
+              <a:t>PVS</a:t>
+            </a:r>
+          </a:p>
+        </p:txBody>
+      </p:sp>
+      <p:sp>
+        <p:nvSpPr>
+          <p:cNvPr id="4" name="Espace réservé du contenu 3">
+            <a:extLst>
+              <a:ext uri="{FF2B5EF4-FFF2-40B4-BE49-F238E27FC236}">
+                <a16:creationId xmlns:a16="http://schemas.microsoft.com/office/drawing/2014/main" id="{95290F31-1EDF-36E0-EADC-CBBF654DD8A8}"/>
+              </a:ext>
+            </a:extLst>
+          </p:cNvPr>
+          <p:cNvSpPr>
+            <a:spLocks noGrp="1"/>
+          </p:cNvSpPr>
+          <p:nvPr>
+            <p:ph idx="1"/>
+          </p:nvPr>
+        </p:nvSpPr>
+        <p:spPr/>
+        <p:txBody>
+          <a:bodyPr/>
+          <a:lstStyle/>
+          <a:p>
+            <a:endParaRPr lang="fr-FR"/>
+          </a:p>
+        </p:txBody>
+      </p:sp>
+      <p:pic>
+        <p:nvPicPr>
+          <p:cNvPr id="6" name="Image 5">
+            <a:extLst>
+              <a:ext uri="{FF2B5EF4-FFF2-40B4-BE49-F238E27FC236}">
+                <a16:creationId xmlns:a16="http://schemas.microsoft.com/office/drawing/2014/main" id="{632067B1-190E-9B08-5B28-B1C1258B2899}"/>
+              </a:ext>
+            </a:extLst>
+          </p:cNvPr>
+          <p:cNvPicPr>
+            <a:picLocks noChangeAspect="1"/>
+          </p:cNvPicPr>
+          <p:nvPr/>
+        </p:nvPicPr>
+        <p:blipFill>
+          <a:blip r:embed="rId2"/>
+          <a:stretch>
+            <a:fillRect/>
+          </a:stretch>
+        </p:blipFill>
+        <p:spPr>
+          <a:xfrm>
+            <a:off x="1835696" y="1291557"/>
+            <a:ext cx="5958317" cy="5149814"/>
+          </a:xfrm>
+          <a:prstGeom prst="rect">
+            <a:avLst/>
+          </a:prstGeom>
+        </p:spPr>
+      </p:pic>
+    </p:spTree>
+    <p:extLst>
+      <p:ext uri="{BB962C8B-B14F-4D97-AF65-F5344CB8AC3E}">
+        <p14:creationId xmlns:p14="http://schemas.microsoft.com/office/powerpoint/2010/main" val="2186361588"/>
+      </p:ext>
+    </p:extLst>
+  </p:cSld>
+  <p:clrMapOvr>
+    <a:masterClrMapping/>
+  </p:clrMapOvr>
+</p:sld>
+</file>
+
+<file path=ppt/slides/slide24.xml><?xml version="1.0" encoding="utf-8"?>
+<p:sld xmlns:a="http://schemas.openxmlformats.org/drawingml/2006/main" xmlns:r="http://schemas.openxmlformats.org/officeDocument/2006/relationships" xmlns:p="http://schemas.openxmlformats.org/presentationml/2006/main">
+  <p:cSld>
+    <p:spTree>
+      <p:nvGrpSpPr>
+        <p:cNvPr id="1" name=""/>
+        <p:cNvGrpSpPr/>
+        <p:nvPr/>
+      </p:nvGrpSpPr>
+      <p:grpSpPr>
+        <a:xfrm>
+          <a:off x="0" y="0"/>
+          <a:ext cx="0" cy="0"/>
+          <a:chOff x="0" y="0"/>
+          <a:chExt cx="0" cy="0"/>
+        </a:xfrm>
+      </p:grpSpPr>
+      <p:sp>
+        <p:nvSpPr>
+          <p:cNvPr id="2" name="Titre 1">
+            <a:extLst>
+              <a:ext uri="{FF2B5EF4-FFF2-40B4-BE49-F238E27FC236}">
+                <a16:creationId xmlns:a16="http://schemas.microsoft.com/office/drawing/2014/main" id="{195452E6-7DA3-0533-60AF-2C5DF8FD2938}"/>
+              </a:ext>
+            </a:extLst>
+          </p:cNvPr>
+          <p:cNvSpPr>
+            <a:spLocks noGrp="1"/>
+          </p:cNvSpPr>
+          <p:nvPr>
+            <p:ph type="title"/>
+          </p:nvPr>
+        </p:nvSpPr>
+        <p:spPr/>
+        <p:txBody>
+          <a:bodyPr/>
+          <a:lstStyle/>
+          <a:p>
+            <a:r>
+              <a:rPr lang="fr-FR" dirty="0"/>
+              <a:t>PVS</a:t>
+            </a:r>
+          </a:p>
+        </p:txBody>
+      </p:sp>
+      <p:sp>
+        <p:nvSpPr>
+          <p:cNvPr id="3" name="Espace réservé du contenu 2">
+            <a:extLst>
+              <a:ext uri="{FF2B5EF4-FFF2-40B4-BE49-F238E27FC236}">
+                <a16:creationId xmlns:a16="http://schemas.microsoft.com/office/drawing/2014/main" id="{FA1BCACF-1904-7D94-0B74-7A3F24164B53}"/>
+              </a:ext>
+            </a:extLst>
+          </p:cNvPr>
+          <p:cNvSpPr>
+            <a:spLocks noGrp="1"/>
+          </p:cNvSpPr>
+          <p:nvPr>
+            <p:ph idx="1"/>
+          </p:nvPr>
+        </p:nvSpPr>
+        <p:spPr/>
+        <p:txBody>
+          <a:bodyPr/>
+          <a:lstStyle/>
+          <a:p>
+            <a:endParaRPr lang="fr-FR"/>
+          </a:p>
+        </p:txBody>
+      </p:sp>
+      <p:pic>
+        <p:nvPicPr>
+          <p:cNvPr id="5" name="Image 4">
+            <a:extLst>
+              <a:ext uri="{FF2B5EF4-FFF2-40B4-BE49-F238E27FC236}">
+                <a16:creationId xmlns:a16="http://schemas.microsoft.com/office/drawing/2014/main" id="{A2975AA5-9C3C-6729-8C52-DB09C93FFD5C}"/>
+              </a:ext>
+            </a:extLst>
+          </p:cNvPr>
+          <p:cNvPicPr>
+            <a:picLocks noChangeAspect="1"/>
+          </p:cNvPicPr>
+          <p:nvPr/>
+        </p:nvPicPr>
+        <p:blipFill>
+          <a:blip r:embed="rId2"/>
+          <a:stretch>
+            <a:fillRect/>
+          </a:stretch>
+        </p:blipFill>
+        <p:spPr>
+          <a:xfrm>
+            <a:off x="925514" y="2152539"/>
+            <a:ext cx="7292972" cy="2552921"/>
+          </a:xfrm>
+          <a:prstGeom prst="rect">
+            <a:avLst/>
+          </a:prstGeom>
+        </p:spPr>
+      </p:pic>
+    </p:spTree>
+    <p:extLst>
+      <p:ext uri="{BB962C8B-B14F-4D97-AF65-F5344CB8AC3E}">
+        <p14:creationId xmlns:p14="http://schemas.microsoft.com/office/powerpoint/2010/main" val="2094604899"/>
+      </p:ext>
+    </p:extLst>
+  </p:cSld>
+  <p:clrMapOvr>
+    <a:masterClrMapping/>
+  </p:clrMapOvr>
+</p:sld>
+</file>
+
+<file path=ppt/slides/slide25.xml><?xml version="1.0" encoding="utf-8"?>
+<p:sld xmlns:a="http://schemas.openxmlformats.org/drawingml/2006/main" xmlns:r="http://schemas.openxmlformats.org/officeDocument/2006/relationships" xmlns:p="http://schemas.openxmlformats.org/presentationml/2006/main">
+  <p:cSld>
+    <p:spTree>
+      <p:nvGrpSpPr>
+        <p:cNvPr id="1" name=""/>
+        <p:cNvGrpSpPr/>
+        <p:nvPr/>
+      </p:nvGrpSpPr>
+      <p:grpSpPr>
+        <a:xfrm>
+          <a:off x="0" y="0"/>
+          <a:ext cx="0" cy="0"/>
+          <a:chOff x="0" y="0"/>
+          <a:chExt cx="0" cy="0"/>
+        </a:xfrm>
+      </p:grpSpPr>
+      <p:sp>
+        <p:nvSpPr>
+          <p:cNvPr id="2" name="Titre 1">
+            <a:extLst>
+              <a:ext uri="{FF2B5EF4-FFF2-40B4-BE49-F238E27FC236}">
+                <a16:creationId xmlns:a16="http://schemas.microsoft.com/office/drawing/2014/main" id="{E698E32C-F6CC-ADBA-B2D4-EB4260BF0737}"/>
+              </a:ext>
+            </a:extLst>
+          </p:cNvPr>
+          <p:cNvSpPr>
+            <a:spLocks noGrp="1"/>
+          </p:cNvSpPr>
+          <p:nvPr>
+            <p:ph type="title"/>
+          </p:nvPr>
+        </p:nvSpPr>
+        <p:spPr/>
+        <p:txBody>
+          <a:bodyPr/>
+          <a:lstStyle/>
+          <a:p>
+            <a:r>
+              <a:rPr lang="fr-FR" dirty="0"/>
+              <a:t>PVS </a:t>
+            </a:r>
+            <a:r>
+              <a:rPr lang="fr-FR" dirty="0" err="1"/>
+              <a:t>Dataset</a:t>
+            </a:r>
+            <a:endParaRPr lang="fr-FR" dirty="0"/>
+          </a:p>
+        </p:txBody>
+      </p:sp>
+      <p:sp>
+        <p:nvSpPr>
+          <p:cNvPr id="3" name="Espace réservé du contenu 2">
+            <a:extLst>
+              <a:ext uri="{FF2B5EF4-FFF2-40B4-BE49-F238E27FC236}">
+                <a16:creationId xmlns:a16="http://schemas.microsoft.com/office/drawing/2014/main" id="{F668327B-6C01-F581-846B-586ADC11AFC2}"/>
+              </a:ext>
+            </a:extLst>
+          </p:cNvPr>
+          <p:cNvSpPr>
+            <a:spLocks noGrp="1"/>
+          </p:cNvSpPr>
+          <p:nvPr>
+            <p:ph idx="1"/>
+          </p:nvPr>
+        </p:nvSpPr>
+        <p:spPr/>
+        <p:txBody>
+          <a:bodyPr/>
+          <a:lstStyle/>
+          <a:p>
+            <a:r>
+              <a:rPr lang="fr-FR" dirty="0"/>
+              <a:t>Download : </a:t>
+            </a:r>
+            <a:r>
+              <a:rPr lang="fr-FR" dirty="0">
+                <a:hlinkClick r:id="rId2"/>
+              </a:rPr>
+              <a:t>https://www.kaggle.com/datasets/jefmenegazzo/pvs-passive-vehicular-sensors-datasets</a:t>
+            </a:r>
+            <a:endParaRPr lang="fr-FR" dirty="0"/>
+          </a:p>
+          <a:p>
+            <a:endParaRPr lang="fr-FR" dirty="0"/>
+          </a:p>
+        </p:txBody>
+      </p:sp>
+      <p:pic>
+        <p:nvPicPr>
+          <p:cNvPr id="5" name="Image 4">
+            <a:extLst>
+              <a:ext uri="{FF2B5EF4-FFF2-40B4-BE49-F238E27FC236}">
+                <a16:creationId xmlns:a16="http://schemas.microsoft.com/office/drawing/2014/main" id="{AAEA7D83-F75B-29D7-E952-F4FE164CD31E}"/>
+              </a:ext>
+            </a:extLst>
+          </p:cNvPr>
+          <p:cNvPicPr>
+            <a:picLocks noChangeAspect="1"/>
+          </p:cNvPicPr>
+          <p:nvPr/>
+        </p:nvPicPr>
+        <p:blipFill>
+          <a:blip r:embed="rId3"/>
+          <a:stretch>
+            <a:fillRect/>
+          </a:stretch>
+        </p:blipFill>
+        <p:spPr>
+          <a:xfrm>
+            <a:off x="1763688" y="2810660"/>
+            <a:ext cx="5090601" cy="3642676"/>
+          </a:xfrm>
+          <a:prstGeom prst="rect">
+            <a:avLst/>
+          </a:prstGeom>
+        </p:spPr>
+      </p:pic>
+    </p:spTree>
+    <p:extLst>
+      <p:ext uri="{BB962C8B-B14F-4D97-AF65-F5344CB8AC3E}">
+        <p14:creationId xmlns:p14="http://schemas.microsoft.com/office/powerpoint/2010/main" val="1777882573"/>
       </p:ext>
     </p:extLst>
   </p:cSld>

--- a/ppt/IoTAI26-RNN.pptx
+++ b/ppt/IoTAI26-RNN.pptx
@@ -5,37 +5,36 @@
     <p:sldMasterId id="2147483653" r:id="rId1"/>
   </p:sldMasterIdLst>
   <p:notesMasterIdLst>
-    <p:notesMasterId r:id="rId27"/>
+    <p:notesMasterId r:id="rId26"/>
   </p:notesMasterIdLst>
   <p:handoutMasterIdLst>
-    <p:handoutMasterId r:id="rId28"/>
+    <p:handoutMasterId r:id="rId27"/>
   </p:handoutMasterIdLst>
   <p:sldIdLst>
     <p:sldId id="264" r:id="rId2"/>
     <p:sldId id="266" r:id="rId3"/>
     <p:sldId id="282" r:id="rId4"/>
     <p:sldId id="283" r:id="rId5"/>
-    <p:sldId id="284" r:id="rId6"/>
-    <p:sldId id="285" r:id="rId7"/>
-    <p:sldId id="268" r:id="rId8"/>
-    <p:sldId id="269" r:id="rId9"/>
-    <p:sldId id="270" r:id="rId10"/>
-    <p:sldId id="271" r:id="rId11"/>
-    <p:sldId id="272" r:id="rId12"/>
-    <p:sldId id="273" r:id="rId13"/>
-    <p:sldId id="274" r:id="rId14"/>
-    <p:sldId id="275" r:id="rId15"/>
-    <p:sldId id="276" r:id="rId16"/>
-    <p:sldId id="277" r:id="rId17"/>
-    <p:sldId id="278" r:id="rId18"/>
-    <p:sldId id="279" r:id="rId19"/>
-    <p:sldId id="280" r:id="rId20"/>
-    <p:sldId id="281" r:id="rId21"/>
-    <p:sldId id="286" r:id="rId22"/>
-    <p:sldId id="287" r:id="rId23"/>
-    <p:sldId id="288" r:id="rId24"/>
-    <p:sldId id="289" r:id="rId25"/>
-    <p:sldId id="290" r:id="rId26"/>
+    <p:sldId id="285" r:id="rId6"/>
+    <p:sldId id="268" r:id="rId7"/>
+    <p:sldId id="269" r:id="rId8"/>
+    <p:sldId id="270" r:id="rId9"/>
+    <p:sldId id="271" r:id="rId10"/>
+    <p:sldId id="272" r:id="rId11"/>
+    <p:sldId id="273" r:id="rId12"/>
+    <p:sldId id="274" r:id="rId13"/>
+    <p:sldId id="275" r:id="rId14"/>
+    <p:sldId id="276" r:id="rId15"/>
+    <p:sldId id="277" r:id="rId16"/>
+    <p:sldId id="278" r:id="rId17"/>
+    <p:sldId id="279" r:id="rId18"/>
+    <p:sldId id="280" r:id="rId19"/>
+    <p:sldId id="281" r:id="rId20"/>
+    <p:sldId id="286" r:id="rId21"/>
+    <p:sldId id="287" r:id="rId22"/>
+    <p:sldId id="288" r:id="rId23"/>
+    <p:sldId id="289" r:id="rId24"/>
+    <p:sldId id="290" r:id="rId25"/>
   </p:sldIdLst>
   <p:sldSz cx="9144000" cy="6858000" type="screen4x3"/>
   <p:notesSz cx="6648450" cy="9782175"/>
@@ -3768,120 +3767,6 @@
           <p:cNvPr id="2" name="Titre 1">
             <a:extLst>
               <a:ext uri="{FF2B5EF4-FFF2-40B4-BE49-F238E27FC236}">
-                <a16:creationId xmlns:a16="http://schemas.microsoft.com/office/drawing/2014/main" id="{EB631060-7A9E-1876-C3DB-E4987C949673}"/>
-              </a:ext>
-            </a:extLst>
-          </p:cNvPr>
-          <p:cNvSpPr>
-            <a:spLocks noGrp="1"/>
-          </p:cNvSpPr>
-          <p:nvPr>
-            <p:ph type="title"/>
-          </p:nvPr>
-        </p:nvSpPr>
-        <p:spPr/>
-        <p:txBody>
-          <a:bodyPr/>
-          <a:lstStyle/>
-          <a:p>
-            <a:r>
-              <a:rPr lang="fr-FR" dirty="0" err="1"/>
-              <a:t>Enroullement</a:t>
-            </a:r>
-            <a:endParaRPr lang="fr-FR" dirty="0"/>
-          </a:p>
-        </p:txBody>
-      </p:sp>
-      <p:sp>
-        <p:nvSpPr>
-          <p:cNvPr id="3" name="Espace réservé du contenu 2">
-            <a:extLst>
-              <a:ext uri="{FF2B5EF4-FFF2-40B4-BE49-F238E27FC236}">
-                <a16:creationId xmlns:a16="http://schemas.microsoft.com/office/drawing/2014/main" id="{D40F7CA6-B1E0-6681-23D7-B1A344FBEC98}"/>
-              </a:ext>
-            </a:extLst>
-          </p:cNvPr>
-          <p:cNvSpPr>
-            <a:spLocks noGrp="1"/>
-          </p:cNvSpPr>
-          <p:nvPr>
-            <p:ph idx="1"/>
-          </p:nvPr>
-        </p:nvSpPr>
-        <p:spPr/>
-        <p:txBody>
-          <a:bodyPr/>
-          <a:lstStyle/>
-          <a:p>
-            <a:endParaRPr lang="fr-FR"/>
-          </a:p>
-        </p:txBody>
-      </p:sp>
-      <p:pic>
-        <p:nvPicPr>
-          <p:cNvPr id="5" name="Image 4">
-            <a:extLst>
-              <a:ext uri="{FF2B5EF4-FFF2-40B4-BE49-F238E27FC236}">
-                <a16:creationId xmlns:a16="http://schemas.microsoft.com/office/drawing/2014/main" id="{03BEF8DF-4458-A8ED-30F1-1C88B932FA2E}"/>
-              </a:ext>
-            </a:extLst>
-          </p:cNvPr>
-          <p:cNvPicPr>
-            <a:picLocks noChangeAspect="1"/>
-          </p:cNvPicPr>
-          <p:nvPr/>
-        </p:nvPicPr>
-        <p:blipFill>
-          <a:blip r:embed="rId2"/>
-          <a:stretch>
-            <a:fillRect/>
-          </a:stretch>
-        </p:blipFill>
-        <p:spPr>
-          <a:xfrm>
-            <a:off x="1835696" y="2492896"/>
-            <a:ext cx="5908743" cy="3501088"/>
-          </a:xfrm>
-          <a:prstGeom prst="rect">
-            <a:avLst/>
-          </a:prstGeom>
-        </p:spPr>
-      </p:pic>
-    </p:spTree>
-    <p:extLst>
-      <p:ext uri="{BB962C8B-B14F-4D97-AF65-F5344CB8AC3E}">
-        <p14:creationId xmlns:p14="http://schemas.microsoft.com/office/powerpoint/2010/main" val="387333661"/>
-      </p:ext>
-    </p:extLst>
-  </p:cSld>
-  <p:clrMapOvr>
-    <a:masterClrMapping/>
-  </p:clrMapOvr>
-</p:sld>
-</file>
-
-<file path=ppt/slides/slide11.xml><?xml version="1.0" encoding="utf-8"?>
-<p:sld xmlns:a="http://schemas.openxmlformats.org/drawingml/2006/main" xmlns:r="http://schemas.openxmlformats.org/officeDocument/2006/relationships" xmlns:p="http://schemas.openxmlformats.org/presentationml/2006/main">
-  <p:cSld>
-    <p:spTree>
-      <p:nvGrpSpPr>
-        <p:cNvPr id="1" name=""/>
-        <p:cNvGrpSpPr/>
-        <p:nvPr/>
-      </p:nvGrpSpPr>
-      <p:grpSpPr>
-        <a:xfrm>
-          <a:off x="0" y="0"/>
-          <a:ext cx="0" cy="0"/>
-          <a:chOff x="0" y="0"/>
-          <a:chExt cx="0" cy="0"/>
-        </a:xfrm>
-      </p:grpSpPr>
-      <p:sp>
-        <p:nvSpPr>
-          <p:cNvPr id="2" name="Titre 1">
-            <a:extLst>
-              <a:ext uri="{FF2B5EF4-FFF2-40B4-BE49-F238E27FC236}">
                 <a16:creationId xmlns:a16="http://schemas.microsoft.com/office/drawing/2014/main" id="{71D8EFD5-9B0D-F083-A6C1-755DFD3FFED1}"/>
               </a:ext>
             </a:extLst>
@@ -3989,7 +3874,7 @@
 </p:sld>
 </file>
 
-<file path=ppt/slides/slide12.xml><?xml version="1.0" encoding="utf-8"?>
+<file path=ppt/slides/slide11.xml><?xml version="1.0" encoding="utf-8"?>
 <p:sld xmlns:a="http://schemas.openxmlformats.org/drawingml/2006/main" xmlns:r="http://schemas.openxmlformats.org/officeDocument/2006/relationships" xmlns:p="http://schemas.openxmlformats.org/presentationml/2006/main">
   <p:cSld>
     <p:spTree>
@@ -4131,6 +4016,98 @@
 </p:sld>
 </file>
 
+<file path=ppt/slides/slide12.xml><?xml version="1.0" encoding="utf-8"?>
+<p:sld xmlns:a="http://schemas.openxmlformats.org/drawingml/2006/main" xmlns:r="http://schemas.openxmlformats.org/officeDocument/2006/relationships" xmlns:p="http://schemas.openxmlformats.org/presentationml/2006/main">
+  <p:cSld>
+    <p:spTree>
+      <p:nvGrpSpPr>
+        <p:cNvPr id="1" name=""/>
+        <p:cNvGrpSpPr/>
+        <p:nvPr/>
+      </p:nvGrpSpPr>
+      <p:grpSpPr>
+        <a:xfrm>
+          <a:off x="0" y="0"/>
+          <a:ext cx="0" cy="0"/>
+          <a:chOff x="0" y="0"/>
+          <a:chExt cx="0" cy="0"/>
+        </a:xfrm>
+      </p:grpSpPr>
+      <p:sp>
+        <p:nvSpPr>
+          <p:cNvPr id="2" name="Titre 1">
+            <a:extLst>
+              <a:ext uri="{FF2B5EF4-FFF2-40B4-BE49-F238E27FC236}">
+                <a16:creationId xmlns:a16="http://schemas.microsoft.com/office/drawing/2014/main" id="{26B76E11-364B-3C8D-34D9-742FCD7D5272}"/>
+              </a:ext>
+            </a:extLst>
+          </p:cNvPr>
+          <p:cNvSpPr>
+            <a:spLocks noGrp="1"/>
+          </p:cNvSpPr>
+          <p:nvPr>
+            <p:ph type="title"/>
+          </p:nvPr>
+        </p:nvSpPr>
+        <p:spPr/>
+        <p:txBody>
+          <a:bodyPr/>
+          <a:lstStyle/>
+          <a:p>
+            <a:r>
+              <a:rPr lang="fr-FR" dirty="0"/>
+              <a:t>RNN Standard</a:t>
+            </a:r>
+          </a:p>
+        </p:txBody>
+      </p:sp>
+      <p:sp>
+        <p:nvSpPr>
+          <p:cNvPr id="3" name="Espace réservé du contenu 2">
+            <a:extLst>
+              <a:ext uri="{FF2B5EF4-FFF2-40B4-BE49-F238E27FC236}">
+                <a16:creationId xmlns:a16="http://schemas.microsoft.com/office/drawing/2014/main" id="{D3D09FC8-C9D7-FC8A-6A3D-E31BFEBC3E9D}"/>
+              </a:ext>
+            </a:extLst>
+          </p:cNvPr>
+          <p:cNvSpPr>
+            <a:spLocks noGrp="1"/>
+          </p:cNvSpPr>
+          <p:nvPr>
+            <p:ph idx="1"/>
+          </p:nvPr>
+        </p:nvSpPr>
+        <p:spPr/>
+        <p:txBody>
+          <a:bodyPr/>
+          <a:lstStyle/>
+          <a:p>
+            <a:r>
+              <a:rPr lang="fr-FR" dirty="0"/>
+              <a:t>La version la plus basique d’un RNN, où la sortie à chaque intervalle temporel dépend à la fois de l’entrée actuelle et de l’état masqué de l’intervalle temporel précédent, souffre de problèmes tels que la disparition des gradients, ce qui rend difficile l’apprentissage des dépendances à long terme</a:t>
+            </a:r>
+          </a:p>
+          <a:p>
+            <a:r>
+              <a:rPr lang="fr-FR" dirty="0"/>
+              <a:t>Ils excellent dans les tâches simples avec des dépendances à court terme, comme prédire le mot suivant dans une phrase (pour les phrases courtes et simples) ou la valeur suivante dans une série temporelle simple.</a:t>
+            </a:r>
+          </a:p>
+        </p:txBody>
+      </p:sp>
+    </p:spTree>
+    <p:extLst>
+      <p:ext uri="{BB962C8B-B14F-4D97-AF65-F5344CB8AC3E}">
+        <p14:creationId xmlns:p14="http://schemas.microsoft.com/office/powerpoint/2010/main" val="3873375569"/>
+      </p:ext>
+    </p:extLst>
+  </p:cSld>
+  <p:clrMapOvr>
+    <a:masterClrMapping/>
+  </p:clrMapOvr>
+</p:sld>
+</file>
+
 <file path=ppt/slides/slide13.xml><?xml version="1.0" encoding="utf-8"?>
 <p:sld xmlns:a="http://schemas.openxmlformats.org/drawingml/2006/main" xmlns:r="http://schemas.openxmlformats.org/officeDocument/2006/relationships" xmlns:p="http://schemas.openxmlformats.org/presentationml/2006/main">
   <p:cSld>
@@ -4153,7 +4130,7 @@
           <p:cNvPr id="2" name="Titre 1">
             <a:extLst>
               <a:ext uri="{FF2B5EF4-FFF2-40B4-BE49-F238E27FC236}">
-                <a16:creationId xmlns:a16="http://schemas.microsoft.com/office/drawing/2014/main" id="{26B76E11-364B-3C8D-34D9-742FCD7D5272}"/>
+                <a16:creationId xmlns:a16="http://schemas.microsoft.com/office/drawing/2014/main" id="{9EC3A29C-EB8B-0020-E714-950BD389FE28}"/>
               </a:ext>
             </a:extLst>
           </p:cNvPr>
@@ -4171,7 +4148,7 @@
           <a:p>
             <a:r>
               <a:rPr lang="fr-FR" dirty="0"/>
-              <a:t>RNN Standard</a:t>
+              <a:t>BRNN</a:t>
             </a:r>
           </a:p>
         </p:txBody>
@@ -4181,7 +4158,7 @@
           <p:cNvPr id="3" name="Espace réservé du contenu 2">
             <a:extLst>
               <a:ext uri="{FF2B5EF4-FFF2-40B4-BE49-F238E27FC236}">
-                <a16:creationId xmlns:a16="http://schemas.microsoft.com/office/drawing/2014/main" id="{D3D09FC8-C9D7-FC8A-6A3D-E31BFEBC3E9D}"/>
+                <a16:creationId xmlns:a16="http://schemas.microsoft.com/office/drawing/2014/main" id="{BBE2EFCA-2486-3E0E-E24A-29E1B603F2AB}"/>
               </a:ext>
             </a:extLst>
           </p:cNvPr>
@@ -4199,13 +4176,20 @@
           <a:p>
             <a:r>
               <a:rPr lang="fr-FR" dirty="0"/>
-              <a:t>La version la plus basique d’un RNN, où la sortie à chaque intervalle temporel dépend à la fois de l’entrée actuelle et de l’état masqué de l’intervalle temporel précédent, souffre de problèmes tels que la disparition des gradients, ce qui rend difficile l’apprentissage des dépendances à long terme</a:t>
-            </a:r>
-          </a:p>
-          <a:p>
-            <a:r>
-              <a:rPr lang="fr-FR" dirty="0"/>
-              <a:t>Ils excellent dans les tâches simples avec des dépendances à court terme, comme prédire le mot suivant dans une phrase (pour les phrases courtes et simples) ou la valeur suivante dans une série temporelle simple.</a:t>
+              <a:t>les RNN bidirectionnels, extraient des données postérieures pour en améliorer la précision</a:t>
+            </a:r>
+          </a:p>
+          <a:p>
+            <a:r>
+              <a:rPr lang="fr-FR" dirty="0"/>
+              <a:t>C’est-à-dire que la prédiction d'une valeur ou d'un mot dépend des mots précédents et suivants</a:t>
+            </a:r>
+          </a:p>
+          <a:p>
+            <a:pPr lvl="1"/>
+            <a:r>
+              <a:rPr lang="fr-FR" dirty="0"/>
+              <a:t>Par exemple une phrase de maitre Yoda</a:t>
             </a:r>
           </a:p>
         </p:txBody>
@@ -4213,7 +4197,7 @@
     </p:spTree>
     <p:extLst>
       <p:ext uri="{BB962C8B-B14F-4D97-AF65-F5344CB8AC3E}">
-        <p14:creationId xmlns:p14="http://schemas.microsoft.com/office/powerpoint/2010/main" val="3873375569"/>
+        <p14:creationId xmlns:p14="http://schemas.microsoft.com/office/powerpoint/2010/main" val="2154805663"/>
       </p:ext>
     </p:extLst>
   </p:cSld>
@@ -4245,105 +4229,6 @@
           <p:cNvPr id="2" name="Titre 1">
             <a:extLst>
               <a:ext uri="{FF2B5EF4-FFF2-40B4-BE49-F238E27FC236}">
-                <a16:creationId xmlns:a16="http://schemas.microsoft.com/office/drawing/2014/main" id="{9EC3A29C-EB8B-0020-E714-950BD389FE28}"/>
-              </a:ext>
-            </a:extLst>
-          </p:cNvPr>
-          <p:cNvSpPr>
-            <a:spLocks noGrp="1"/>
-          </p:cNvSpPr>
-          <p:nvPr>
-            <p:ph type="title"/>
-          </p:nvPr>
-        </p:nvSpPr>
-        <p:spPr/>
-        <p:txBody>
-          <a:bodyPr/>
-          <a:lstStyle/>
-          <a:p>
-            <a:r>
-              <a:rPr lang="fr-FR" dirty="0"/>
-              <a:t>BRNN</a:t>
-            </a:r>
-          </a:p>
-        </p:txBody>
-      </p:sp>
-      <p:sp>
-        <p:nvSpPr>
-          <p:cNvPr id="3" name="Espace réservé du contenu 2">
-            <a:extLst>
-              <a:ext uri="{FF2B5EF4-FFF2-40B4-BE49-F238E27FC236}">
-                <a16:creationId xmlns:a16="http://schemas.microsoft.com/office/drawing/2014/main" id="{BBE2EFCA-2486-3E0E-E24A-29E1B603F2AB}"/>
-              </a:ext>
-            </a:extLst>
-          </p:cNvPr>
-          <p:cNvSpPr>
-            <a:spLocks noGrp="1"/>
-          </p:cNvSpPr>
-          <p:nvPr>
-            <p:ph idx="1"/>
-          </p:nvPr>
-        </p:nvSpPr>
-        <p:spPr/>
-        <p:txBody>
-          <a:bodyPr/>
-          <a:lstStyle/>
-          <a:p>
-            <a:r>
-              <a:rPr lang="fr-FR" dirty="0"/>
-              <a:t>les RNN bidirectionnels, extraient des données postérieures pour en améliorer la précision</a:t>
-            </a:r>
-          </a:p>
-          <a:p>
-            <a:r>
-              <a:rPr lang="fr-FR" dirty="0"/>
-              <a:t>C’est-à-dire que la prédiction d'une valeur ou d'un mot dépend des mots précédents et suivants</a:t>
-            </a:r>
-          </a:p>
-          <a:p>
-            <a:pPr lvl="1"/>
-            <a:r>
-              <a:rPr lang="fr-FR" dirty="0"/>
-              <a:t>Par exemple une phrase de maitre Yoda</a:t>
-            </a:r>
-          </a:p>
-        </p:txBody>
-      </p:sp>
-    </p:spTree>
-    <p:extLst>
-      <p:ext uri="{BB962C8B-B14F-4D97-AF65-F5344CB8AC3E}">
-        <p14:creationId xmlns:p14="http://schemas.microsoft.com/office/powerpoint/2010/main" val="2154805663"/>
-      </p:ext>
-    </p:extLst>
-  </p:cSld>
-  <p:clrMapOvr>
-    <a:masterClrMapping/>
-  </p:clrMapOvr>
-</p:sld>
-</file>
-
-<file path=ppt/slides/slide15.xml><?xml version="1.0" encoding="utf-8"?>
-<p:sld xmlns:a="http://schemas.openxmlformats.org/drawingml/2006/main" xmlns:r="http://schemas.openxmlformats.org/officeDocument/2006/relationships" xmlns:p="http://schemas.openxmlformats.org/presentationml/2006/main">
-  <p:cSld>
-    <p:spTree>
-      <p:nvGrpSpPr>
-        <p:cNvPr id="1" name=""/>
-        <p:cNvGrpSpPr/>
-        <p:nvPr/>
-      </p:nvGrpSpPr>
-      <p:grpSpPr>
-        <a:xfrm>
-          <a:off x="0" y="0"/>
-          <a:ext cx="0" cy="0"/>
-          <a:chOff x="0" y="0"/>
-          <a:chExt cx="0" cy="0"/>
-        </a:xfrm>
-      </p:grpSpPr>
-      <p:sp>
-        <p:nvSpPr>
-          <p:cNvPr id="2" name="Titre 1">
-            <a:extLst>
-              <a:ext uri="{FF2B5EF4-FFF2-40B4-BE49-F238E27FC236}">
                 <a16:creationId xmlns:a16="http://schemas.microsoft.com/office/drawing/2014/main" id="{340363C2-E961-5EA0-FF60-B101E7C9F5DE}"/>
               </a:ext>
             </a:extLst>
@@ -4443,7 +4328,7 @@
 </p:sld>
 </file>
 
-<file path=ppt/slides/slide16.xml><?xml version="1.0" encoding="utf-8"?>
+<file path=ppt/slides/slide15.xml><?xml version="1.0" encoding="utf-8"?>
 <p:sld xmlns:a="http://schemas.openxmlformats.org/drawingml/2006/main" xmlns:r="http://schemas.openxmlformats.org/officeDocument/2006/relationships" xmlns:p="http://schemas.openxmlformats.org/presentationml/2006/main">
   <p:cSld>
     <p:spTree>
@@ -4556,7 +4441,7 @@
 </p:sld>
 </file>
 
-<file path=ppt/slides/slide17.xml><?xml version="1.0" encoding="utf-8"?>
+<file path=ppt/slides/slide16.xml><?xml version="1.0" encoding="utf-8"?>
 <p:sld xmlns:a="http://schemas.openxmlformats.org/drawingml/2006/main" xmlns:r="http://schemas.openxmlformats.org/officeDocument/2006/relationships" xmlns:p="http://schemas.openxmlformats.org/presentationml/2006/main">
   <p:cSld>
     <p:spTree>
@@ -4679,6 +4564,109 @@
 </p:sld>
 </file>
 
+<file path=ppt/slides/slide17.xml><?xml version="1.0" encoding="utf-8"?>
+<p:sld xmlns:a="http://schemas.openxmlformats.org/drawingml/2006/main" xmlns:r="http://schemas.openxmlformats.org/officeDocument/2006/relationships" xmlns:p="http://schemas.openxmlformats.org/presentationml/2006/main">
+  <p:cSld>
+    <p:spTree>
+      <p:nvGrpSpPr>
+        <p:cNvPr id="1" name=""/>
+        <p:cNvGrpSpPr/>
+        <p:nvPr/>
+      </p:nvGrpSpPr>
+      <p:grpSpPr>
+        <a:xfrm>
+          <a:off x="0" y="0"/>
+          <a:ext cx="0" cy="0"/>
+          <a:chOff x="0" y="0"/>
+          <a:chExt cx="0" cy="0"/>
+        </a:xfrm>
+      </p:grpSpPr>
+      <p:sp>
+        <p:nvSpPr>
+          <p:cNvPr id="2" name="Titre 1">
+            <a:extLst>
+              <a:ext uri="{FF2B5EF4-FFF2-40B4-BE49-F238E27FC236}">
+                <a16:creationId xmlns:a16="http://schemas.microsoft.com/office/drawing/2014/main" id="{EB9A2EB2-E46A-F77D-15BC-CEFF9790ACDC}"/>
+              </a:ext>
+            </a:extLst>
+          </p:cNvPr>
+          <p:cNvSpPr>
+            <a:spLocks noGrp="1"/>
+          </p:cNvSpPr>
+          <p:nvPr>
+            <p:ph type="title"/>
+          </p:nvPr>
+        </p:nvSpPr>
+        <p:spPr/>
+        <p:txBody>
+          <a:bodyPr/>
+          <a:lstStyle/>
+          <a:p>
+            <a:r>
+              <a:rPr lang="fr-FR" dirty="0"/>
+              <a:t>RNN Encodeur </a:t>
+            </a:r>
+            <a:r>
+              <a:rPr lang="fr-FR" dirty="0" err="1"/>
+              <a:t>Decoder</a:t>
+            </a:r>
+            <a:endParaRPr lang="fr-FR" dirty="0"/>
+          </a:p>
+        </p:txBody>
+      </p:sp>
+      <p:sp>
+        <p:nvSpPr>
+          <p:cNvPr id="3" name="Espace réservé du contenu 2">
+            <a:extLst>
+              <a:ext uri="{FF2B5EF4-FFF2-40B4-BE49-F238E27FC236}">
+                <a16:creationId xmlns:a16="http://schemas.microsoft.com/office/drawing/2014/main" id="{2126137D-8F4E-559B-277B-CAAED0C4E7EA}"/>
+              </a:ext>
+            </a:extLst>
+          </p:cNvPr>
+          <p:cNvSpPr>
+            <a:spLocks noGrp="1"/>
+          </p:cNvSpPr>
+          <p:nvPr>
+            <p:ph idx="1"/>
+          </p:nvPr>
+        </p:nvSpPr>
+        <p:spPr/>
+        <p:txBody>
+          <a:bodyPr/>
+          <a:lstStyle/>
+          <a:p>
+            <a:r>
+              <a:rPr lang="fr-FR" dirty="0"/>
+              <a:t>Ils sont couramment utilisés pour les tâches de séquence à séquence, telles que la traduction automatique</a:t>
+            </a:r>
+          </a:p>
+          <a:p>
+            <a:r>
+              <a:rPr lang="fr-FR" dirty="0"/>
+              <a:t>L’encodeur traite la séquence d’entrée dans un vecteur de longueur fixe (contexte) et le décodeur utilise ce contexte pour générer la séquence de sortie</a:t>
+            </a:r>
+          </a:p>
+          <a:p>
+            <a:r>
+              <a:rPr lang="fr-FR" dirty="0"/>
+              <a:t>Quand la tailler de la sortie est égale à l'entrée il s'agit d'un Transformer</a:t>
+            </a:r>
+          </a:p>
+        </p:txBody>
+      </p:sp>
+    </p:spTree>
+    <p:extLst>
+      <p:ext uri="{BB962C8B-B14F-4D97-AF65-F5344CB8AC3E}">
+        <p14:creationId xmlns:p14="http://schemas.microsoft.com/office/powerpoint/2010/main" val="3160228807"/>
+      </p:ext>
+    </p:extLst>
+  </p:cSld>
+  <p:clrMapOvr>
+    <a:masterClrMapping/>
+  </p:clrMapOvr>
+</p:sld>
+</file>
+
 <file path=ppt/slides/slide18.xml><?xml version="1.0" encoding="utf-8"?>
 <p:sld xmlns:a="http://schemas.openxmlformats.org/drawingml/2006/main" xmlns:r="http://schemas.openxmlformats.org/officeDocument/2006/relationships" xmlns:p="http://schemas.openxmlformats.org/presentationml/2006/main">
   <p:cSld>
@@ -4701,7 +4689,7 @@
           <p:cNvPr id="2" name="Titre 1">
             <a:extLst>
               <a:ext uri="{FF2B5EF4-FFF2-40B4-BE49-F238E27FC236}">
-                <a16:creationId xmlns:a16="http://schemas.microsoft.com/office/drawing/2014/main" id="{EB9A2EB2-E46A-F77D-15BC-CEFF9790ACDC}"/>
+                <a16:creationId xmlns:a16="http://schemas.microsoft.com/office/drawing/2014/main" id="{8DFDA05E-3438-4728-EF6F-99F3BC94A726}"/>
               </a:ext>
             </a:extLst>
           </p:cNvPr>
@@ -4718,12 +4706,8 @@
           <a:lstStyle/>
           <a:p>
             <a:r>
-              <a:rPr lang="fr-FR" dirty="0"/>
-              <a:t>RNN Encodeur </a:t>
-            </a:r>
-            <a:r>
               <a:rPr lang="fr-FR" dirty="0" err="1"/>
-              <a:t>Decoder</a:t>
+              <a:t>Keras</a:t>
             </a:r>
             <a:endParaRPr lang="fr-FR" dirty="0"/>
           </a:p>
@@ -4734,7 +4718,7 @@
           <p:cNvPr id="3" name="Espace réservé du contenu 2">
             <a:extLst>
               <a:ext uri="{FF2B5EF4-FFF2-40B4-BE49-F238E27FC236}">
-                <a16:creationId xmlns:a16="http://schemas.microsoft.com/office/drawing/2014/main" id="{2126137D-8F4E-559B-277B-CAAED0C4E7EA}"/>
+                <a16:creationId xmlns:a16="http://schemas.microsoft.com/office/drawing/2014/main" id="{BC18B85F-0860-56BB-4B39-2FD696CA45D6}"/>
               </a:ext>
             </a:extLst>
           </p:cNvPr>
@@ -4751,28 +4735,79 @@
           <a:lstStyle/>
           <a:p>
             <a:r>
-              <a:rPr lang="fr-FR" dirty="0"/>
-              <a:t>Ils sont couramment utilisés pour les tâches de séquence à séquence, telles que la traduction automatique</a:t>
-            </a:r>
-          </a:p>
-          <a:p>
-            <a:r>
-              <a:rPr lang="fr-FR" dirty="0"/>
-              <a:t>L’encodeur traite la séquence d’entrée dans un vecteur de longueur fixe (contexte) et le décodeur utilise ce contexte pour générer la séquence de sortie</a:t>
-            </a:r>
-          </a:p>
-          <a:p>
-            <a:r>
-              <a:rPr lang="fr-FR" dirty="0"/>
-              <a:t>Quand la tailler de la sortie est égale à l'entrée il s'agit d'un Transformer</a:t>
-            </a:r>
+              <a:rPr lang="fr-FR" dirty="0" err="1"/>
+              <a:t>Keras</a:t>
+            </a:r>
+            <a:r>
+              <a:rPr lang="fr-FR" dirty="0"/>
+              <a:t> intègre des types de neurones RNN</a:t>
+            </a:r>
+          </a:p>
+          <a:p>
+            <a:pPr lvl="1"/>
+            <a:r>
+              <a:rPr lang="fr-FR" dirty="0"/>
+              <a:t>LSTM</a:t>
+            </a:r>
+          </a:p>
+          <a:p>
+            <a:pPr lvl="1"/>
+            <a:r>
+              <a:rPr lang="fr-FR" dirty="0"/>
+              <a:t>GRU</a:t>
+            </a:r>
+          </a:p>
+          <a:p>
+            <a:pPr lvl="1"/>
+            <a:r>
+              <a:rPr lang="fr-FR" dirty="0"/>
+              <a:t>Le paramètre </a:t>
+            </a:r>
+            <a:r>
+              <a:rPr lang="fr-FR" dirty="0" err="1"/>
+              <a:t>return_sequences</a:t>
+            </a:r>
+            <a:r>
+              <a:rPr lang="fr-FR" dirty="0"/>
+              <a:t>=False indique si la sortie retourne le dernier paramètre ou toute la séquence</a:t>
+            </a:r>
+          </a:p>
+          <a:p>
+            <a:pPr lvl="1"/>
+            <a:r>
+              <a:rPr lang="fr-FR" dirty="0"/>
+              <a:t>La forme d'un RNN est x, </a:t>
+            </a:r>
+            <a:r>
+              <a:rPr lang="fr-FR" dirty="0" err="1"/>
+              <a:t>time_step</a:t>
+            </a:r>
+            <a:r>
+              <a:rPr lang="fr-FR" dirty="0"/>
+              <a:t>, y</a:t>
+            </a:r>
+          </a:p>
+          <a:p>
+            <a:r>
+              <a:rPr lang="fr-FR" dirty="0"/>
+              <a:t>Non compatible </a:t>
+            </a:r>
+            <a:r>
+              <a:rPr lang="fr-FR" dirty="0" err="1"/>
+              <a:t>TinyMaix</a:t>
+            </a:r>
+            <a:endParaRPr lang="fr-FR" dirty="0"/>
+          </a:p>
+          <a:p>
+            <a:pPr lvl="1"/>
+            <a:endParaRPr lang="fr-FR" dirty="0"/>
           </a:p>
         </p:txBody>
       </p:sp>
     </p:spTree>
     <p:extLst>
       <p:ext uri="{BB962C8B-B14F-4D97-AF65-F5344CB8AC3E}">
-        <p14:creationId xmlns:p14="http://schemas.microsoft.com/office/powerpoint/2010/main" val="3160228807"/>
+        <p14:creationId xmlns:p14="http://schemas.microsoft.com/office/powerpoint/2010/main" val="3564221334"/>
       </p:ext>
     </p:extLst>
   </p:cSld>
@@ -4804,7 +4839,7 @@
           <p:cNvPr id="2" name="Titre 1">
             <a:extLst>
               <a:ext uri="{FF2B5EF4-FFF2-40B4-BE49-F238E27FC236}">
-                <a16:creationId xmlns:a16="http://schemas.microsoft.com/office/drawing/2014/main" id="{8DFDA05E-3438-4728-EF6F-99F3BC94A726}"/>
+                <a16:creationId xmlns:a16="http://schemas.microsoft.com/office/drawing/2014/main" id="{1B960150-FC42-1802-FA01-6D7316A97EB9}"/>
               </a:ext>
             </a:extLst>
           </p:cNvPr>
@@ -4821,8 +4856,8 @@
           <a:lstStyle/>
           <a:p>
             <a:r>
-              <a:rPr lang="fr-FR" dirty="0" err="1"/>
-              <a:t>Keras</a:t>
+              <a:rPr lang="fr-FR"/>
+              <a:t>TP 26</a:t>
             </a:r>
             <a:endParaRPr lang="fr-FR" dirty="0"/>
           </a:p>
@@ -4833,7 +4868,7 @@
           <p:cNvPr id="3" name="Espace réservé du contenu 2">
             <a:extLst>
               <a:ext uri="{FF2B5EF4-FFF2-40B4-BE49-F238E27FC236}">
-                <a16:creationId xmlns:a16="http://schemas.microsoft.com/office/drawing/2014/main" id="{BC18B85F-0860-56BB-4B39-2FD696CA45D6}"/>
+                <a16:creationId xmlns:a16="http://schemas.microsoft.com/office/drawing/2014/main" id="{8939214D-1445-B97B-6E06-CA5B7E1F132D}"/>
               </a:ext>
             </a:extLst>
           </p:cNvPr>
@@ -4850,79 +4885,28 @@
           <a:lstStyle/>
           <a:p>
             <a:r>
-              <a:rPr lang="fr-FR" dirty="0" err="1"/>
-              <a:t>Keras</a:t>
-            </a:r>
-            <a:r>
-              <a:rPr lang="fr-FR" dirty="0"/>
-              <a:t> intègre des types de neurones RNN</a:t>
-            </a:r>
-          </a:p>
-          <a:p>
-            <a:pPr lvl="1"/>
-            <a:r>
-              <a:rPr lang="fr-FR" dirty="0"/>
-              <a:t>LSTM</a:t>
-            </a:r>
-          </a:p>
-          <a:p>
-            <a:pPr lvl="1"/>
-            <a:r>
-              <a:rPr lang="fr-FR" dirty="0"/>
-              <a:t>GRU</a:t>
-            </a:r>
-          </a:p>
-          <a:p>
-            <a:pPr lvl="1"/>
-            <a:r>
-              <a:rPr lang="fr-FR" dirty="0"/>
-              <a:t>Le paramètre </a:t>
-            </a:r>
-            <a:r>
-              <a:rPr lang="fr-FR" dirty="0" err="1"/>
-              <a:t>return_sequences</a:t>
-            </a:r>
-            <a:r>
-              <a:rPr lang="fr-FR" dirty="0"/>
-              <a:t>=False indique si la sortie retourne le dernier paramètre ou toute la séquence</a:t>
-            </a:r>
-          </a:p>
-          <a:p>
-            <a:pPr lvl="1"/>
-            <a:r>
-              <a:rPr lang="fr-FR" dirty="0"/>
-              <a:t>La forme d'un RNN est x, </a:t>
-            </a:r>
-            <a:r>
-              <a:rPr lang="fr-FR" dirty="0" err="1"/>
-              <a:t>time_step</a:t>
-            </a:r>
-            <a:r>
-              <a:rPr lang="fr-FR" dirty="0"/>
-              <a:t>, y</a:t>
-            </a:r>
-          </a:p>
-          <a:p>
-            <a:r>
-              <a:rPr lang="fr-FR" dirty="0"/>
-              <a:t>Non compatible </a:t>
-            </a:r>
-            <a:r>
-              <a:rPr lang="fr-FR" dirty="0" err="1"/>
-              <a:t>TinyMaix</a:t>
-            </a:r>
-            <a:endParaRPr lang="fr-FR" dirty="0"/>
-          </a:p>
-          <a:p>
-            <a:pPr lvl="1"/>
-            <a:endParaRPr lang="fr-FR" dirty="0"/>
+              <a:rPr lang="fr-FR" dirty="0"/>
+              <a:t>HAR Conv1d</a:t>
+            </a:r>
+          </a:p>
+          <a:p>
+            <a:r>
+              <a:rPr lang="fr-FR" dirty="0"/>
+              <a:t>HAR RNN</a:t>
+            </a:r>
+          </a:p>
+          <a:p>
+            <a:r>
+              <a:rPr lang="fr-FR" dirty="0"/>
+              <a:t>HAR LSTM</a:t>
+            </a:r>
           </a:p>
         </p:txBody>
       </p:sp>
     </p:spTree>
     <p:extLst>
       <p:ext uri="{BB962C8B-B14F-4D97-AF65-F5344CB8AC3E}">
-        <p14:creationId xmlns:p14="http://schemas.microsoft.com/office/powerpoint/2010/main" val="3564221334"/>
+        <p14:creationId xmlns:p14="http://schemas.microsoft.com/office/powerpoint/2010/main" val="3000630258"/>
       </p:ext>
     </p:extLst>
   </p:cSld>
@@ -5079,7 +5063,7 @@
           <p:cNvPr id="2" name="Titre 1">
             <a:extLst>
               <a:ext uri="{FF2B5EF4-FFF2-40B4-BE49-F238E27FC236}">
-                <a16:creationId xmlns:a16="http://schemas.microsoft.com/office/drawing/2014/main" id="{1B960150-FC42-1802-FA01-6D7316A97EB9}"/>
+                <a16:creationId xmlns:a16="http://schemas.microsoft.com/office/drawing/2014/main" id="{C20B2ADD-DFA2-CDEB-DA16-CAE08248DBE2}"/>
               </a:ext>
             </a:extLst>
           </p:cNvPr>
@@ -5096,10 +5080,9 @@
           <a:lstStyle/>
           <a:p>
             <a:r>
-              <a:rPr lang="fr-FR"/>
-              <a:t>TP 26</a:t>
-            </a:r>
-            <a:endParaRPr lang="fr-FR" dirty="0"/>
+              <a:rPr lang="fr-FR" dirty="0"/>
+              <a:t>Modèles mixtes</a:t>
+            </a:r>
           </a:p>
         </p:txBody>
       </p:sp>
@@ -5108,7 +5091,7 @@
           <p:cNvPr id="3" name="Espace réservé du contenu 2">
             <a:extLst>
               <a:ext uri="{FF2B5EF4-FFF2-40B4-BE49-F238E27FC236}">
-                <a16:creationId xmlns:a16="http://schemas.microsoft.com/office/drawing/2014/main" id="{8939214D-1445-B97B-6E06-CA5B7E1F132D}"/>
+                <a16:creationId xmlns:a16="http://schemas.microsoft.com/office/drawing/2014/main" id="{6D6F84F1-F941-918B-4608-04BECF6D17E9}"/>
               </a:ext>
             </a:extLst>
           </p:cNvPr>
@@ -5126,19 +5109,21 @@
           <a:p>
             <a:r>
               <a:rPr lang="fr-FR" dirty="0"/>
-              <a:t>HAR Conv1d</a:t>
-            </a:r>
-          </a:p>
-          <a:p>
-            <a:r>
-              <a:rPr lang="fr-FR" dirty="0"/>
-              <a:t>HAR RNN</a:t>
-            </a:r>
-          </a:p>
-          <a:p>
-            <a:r>
-              <a:rPr lang="fr-FR" dirty="0"/>
-              <a:t>HAR LSTM</a:t>
+              <a:t>Il est possible de mixer les modèles</a:t>
+            </a:r>
+          </a:p>
+          <a:p>
+            <a:pPr lvl="1"/>
+            <a:r>
+              <a:rPr lang="fr-FR" dirty="0"/>
+              <a:t>RNN pour la gestion du temps</a:t>
+            </a:r>
+          </a:p>
+          <a:p>
+            <a:pPr lvl="1"/>
+            <a:r>
+              <a:rPr lang="fr-FR" dirty="0"/>
+              <a:t>Conv1d pour la gestion des fenêtres temporelles</a:t>
             </a:r>
           </a:p>
         </p:txBody>
@@ -5146,7 +5131,7 @@
     </p:spTree>
     <p:extLst>
       <p:ext uri="{BB962C8B-B14F-4D97-AF65-F5344CB8AC3E}">
-        <p14:creationId xmlns:p14="http://schemas.microsoft.com/office/powerpoint/2010/main" val="3000630258"/>
+        <p14:creationId xmlns:p14="http://schemas.microsoft.com/office/powerpoint/2010/main" val="741150595"/>
       </p:ext>
     </p:extLst>
   </p:cSld>
@@ -5178,106 +5163,6 @@
           <p:cNvPr id="2" name="Titre 1">
             <a:extLst>
               <a:ext uri="{FF2B5EF4-FFF2-40B4-BE49-F238E27FC236}">
-                <a16:creationId xmlns:a16="http://schemas.microsoft.com/office/drawing/2014/main" id="{C20B2ADD-DFA2-CDEB-DA16-CAE08248DBE2}"/>
-              </a:ext>
-            </a:extLst>
-          </p:cNvPr>
-          <p:cNvSpPr>
-            <a:spLocks noGrp="1"/>
-          </p:cNvSpPr>
-          <p:nvPr>
-            <p:ph type="title"/>
-          </p:nvPr>
-        </p:nvSpPr>
-        <p:spPr/>
-        <p:txBody>
-          <a:bodyPr/>
-          <a:lstStyle/>
-          <a:p>
-            <a:r>
-              <a:rPr lang="fr-FR" dirty="0"/>
-              <a:t>Modèles mixtes</a:t>
-            </a:r>
-          </a:p>
-        </p:txBody>
-      </p:sp>
-      <p:sp>
-        <p:nvSpPr>
-          <p:cNvPr id="3" name="Espace réservé du contenu 2">
-            <a:extLst>
-              <a:ext uri="{FF2B5EF4-FFF2-40B4-BE49-F238E27FC236}">
-                <a16:creationId xmlns:a16="http://schemas.microsoft.com/office/drawing/2014/main" id="{6D6F84F1-F941-918B-4608-04BECF6D17E9}"/>
-              </a:ext>
-            </a:extLst>
-          </p:cNvPr>
-          <p:cNvSpPr>
-            <a:spLocks noGrp="1"/>
-          </p:cNvSpPr>
-          <p:nvPr>
-            <p:ph idx="1"/>
-          </p:nvPr>
-        </p:nvSpPr>
-        <p:spPr/>
-        <p:txBody>
-          <a:bodyPr/>
-          <a:lstStyle/>
-          <a:p>
-            <a:r>
-              <a:rPr lang="fr-FR" dirty="0"/>
-              <a:t>Il est possible de mixer les modèles</a:t>
-            </a:r>
-          </a:p>
-          <a:p>
-            <a:pPr lvl="1"/>
-            <a:r>
-              <a:rPr lang="fr-FR" dirty="0"/>
-              <a:t>RNN pour la gestion du temps</a:t>
-            </a:r>
-          </a:p>
-          <a:p>
-            <a:pPr lvl="1"/>
-            <a:r>
-              <a:rPr lang="fr-FR" dirty="0"/>
-              <a:t>Conv1d pour la gestion des fenêtres temporelles</a:t>
-            </a:r>
-          </a:p>
-        </p:txBody>
-      </p:sp>
-    </p:spTree>
-    <p:extLst>
-      <p:ext uri="{BB962C8B-B14F-4D97-AF65-F5344CB8AC3E}">
-        <p14:creationId xmlns:p14="http://schemas.microsoft.com/office/powerpoint/2010/main" val="741150595"/>
-      </p:ext>
-    </p:extLst>
-  </p:cSld>
-  <p:clrMapOvr>
-    <a:masterClrMapping/>
-  </p:clrMapOvr>
-</p:sld>
-</file>
-
-<file path=ppt/slides/slide22.xml><?xml version="1.0" encoding="utf-8"?>
-<p:sld xmlns:a="http://schemas.openxmlformats.org/drawingml/2006/main" xmlns:r="http://schemas.openxmlformats.org/officeDocument/2006/relationships" xmlns:p="http://schemas.openxmlformats.org/presentationml/2006/main">
-  <p:cSld>
-    <p:spTree>
-      <p:nvGrpSpPr>
-        <p:cNvPr id="1" name=""/>
-        <p:cNvGrpSpPr/>
-        <p:nvPr/>
-      </p:nvGrpSpPr>
-      <p:grpSpPr>
-        <a:xfrm>
-          <a:off x="0" y="0"/>
-          <a:ext cx="0" cy="0"/>
-          <a:chOff x="0" y="0"/>
-          <a:chExt cx="0" cy="0"/>
-        </a:xfrm>
-      </p:grpSpPr>
-      <p:sp>
-        <p:nvSpPr>
-          <p:cNvPr id="2" name="Titre 1">
-            <a:extLst>
-              <a:ext uri="{FF2B5EF4-FFF2-40B4-BE49-F238E27FC236}">
                 <a16:creationId xmlns:a16="http://schemas.microsoft.com/office/drawing/2014/main" id="{D2CD824C-E1FF-5839-9475-500AAAC0E049}"/>
               </a:ext>
             </a:extLst>
@@ -5361,7 +5246,7 @@
 </p:sld>
 </file>
 
-<file path=ppt/slides/slide23.xml><?xml version="1.0" encoding="utf-8"?>
+<file path=ppt/slides/slide22.xml><?xml version="1.0" encoding="utf-8"?>
 <p:sld xmlns:a="http://schemas.openxmlformats.org/drawingml/2006/main" xmlns:r="http://schemas.openxmlformats.org/officeDocument/2006/relationships" xmlns:p="http://schemas.openxmlformats.org/presentationml/2006/main">
   <p:cSld>
     <p:spTree>
@@ -5474,7 +5359,7 @@
 </p:sld>
 </file>
 
-<file path=ppt/slides/slide24.xml><?xml version="1.0" encoding="utf-8"?>
+<file path=ppt/slides/slide23.xml><?xml version="1.0" encoding="utf-8"?>
 <p:sld xmlns:a="http://schemas.openxmlformats.org/drawingml/2006/main" xmlns:r="http://schemas.openxmlformats.org/officeDocument/2006/relationships" xmlns:p="http://schemas.openxmlformats.org/presentationml/2006/main">
   <p:cSld>
     <p:spTree>
@@ -5587,7 +5472,7 @@
 </p:sld>
 </file>
 
-<file path=ppt/slides/slide25.xml><?xml version="1.0" encoding="utf-8"?>
+<file path=ppt/slides/slide24.xml><?xml version="1.0" encoding="utf-8"?>
 <p:sld xmlns:a="http://schemas.openxmlformats.org/drawingml/2006/main" xmlns:r="http://schemas.openxmlformats.org/officeDocument/2006/relationships" xmlns:p="http://schemas.openxmlformats.org/presentationml/2006/main">
   <p:cSld>
     <p:spTree>
@@ -6102,92 +5987,6 @@
           <p:cNvPr id="2" name="Titre 1">
             <a:extLst>
               <a:ext uri="{FF2B5EF4-FFF2-40B4-BE49-F238E27FC236}">
-                <a16:creationId xmlns:a16="http://schemas.microsoft.com/office/drawing/2014/main" id="{1AF4751C-EE54-8749-7AA9-5B089095BE8A}"/>
-              </a:ext>
-            </a:extLst>
-          </p:cNvPr>
-          <p:cNvSpPr>
-            <a:spLocks noGrp="1"/>
-          </p:cNvSpPr>
-          <p:nvPr>
-            <p:ph type="title"/>
-          </p:nvPr>
-        </p:nvSpPr>
-        <p:spPr/>
-        <p:txBody>
-          <a:bodyPr/>
-          <a:lstStyle/>
-          <a:p>
-            <a:r>
-              <a:rPr lang="fr-FR" dirty="0"/>
-              <a:t>TP 25</a:t>
-            </a:r>
-          </a:p>
-        </p:txBody>
-      </p:sp>
-      <p:sp>
-        <p:nvSpPr>
-          <p:cNvPr id="3" name="Espace réservé du contenu 2">
-            <a:extLst>
-              <a:ext uri="{FF2B5EF4-FFF2-40B4-BE49-F238E27FC236}">
-                <a16:creationId xmlns:a16="http://schemas.microsoft.com/office/drawing/2014/main" id="{383691EF-798E-B7F6-A0C9-7E2FD9F07159}"/>
-              </a:ext>
-            </a:extLst>
-          </p:cNvPr>
-          <p:cNvSpPr>
-            <a:spLocks noGrp="1"/>
-          </p:cNvSpPr>
-          <p:nvPr>
-            <p:ph idx="1"/>
-          </p:nvPr>
-        </p:nvSpPr>
-        <p:spPr/>
-        <p:txBody>
-          <a:bodyPr/>
-          <a:lstStyle/>
-          <a:p>
-            <a:r>
-              <a:rPr lang="fr-FR" dirty="0"/>
-              <a:t>HAR CNN Démo</a:t>
-            </a:r>
-          </a:p>
-        </p:txBody>
-      </p:sp>
-    </p:spTree>
-    <p:extLst>
-      <p:ext uri="{BB962C8B-B14F-4D97-AF65-F5344CB8AC3E}">
-        <p14:creationId xmlns:p14="http://schemas.microsoft.com/office/powerpoint/2010/main" val="500441861"/>
-      </p:ext>
-    </p:extLst>
-  </p:cSld>
-  <p:clrMapOvr>
-    <a:masterClrMapping/>
-  </p:clrMapOvr>
-</p:sld>
-</file>
-
-<file path=ppt/slides/slide6.xml><?xml version="1.0" encoding="utf-8"?>
-<p:sld xmlns:a="http://schemas.openxmlformats.org/drawingml/2006/main" xmlns:r="http://schemas.openxmlformats.org/officeDocument/2006/relationships" xmlns:p="http://schemas.openxmlformats.org/presentationml/2006/main">
-  <p:cSld>
-    <p:spTree>
-      <p:nvGrpSpPr>
-        <p:cNvPr id="1" name=""/>
-        <p:cNvGrpSpPr/>
-        <p:nvPr/>
-      </p:nvGrpSpPr>
-      <p:grpSpPr>
-        <a:xfrm>
-          <a:off x="0" y="0"/>
-          <a:ext cx="0" cy="0"/>
-          <a:chOff x="0" y="0"/>
-          <a:chExt cx="0" cy="0"/>
-        </a:xfrm>
-      </p:grpSpPr>
-      <p:sp>
-        <p:nvSpPr>
-          <p:cNvPr id="2" name="Titre 1">
-            <a:extLst>
-              <a:ext uri="{FF2B5EF4-FFF2-40B4-BE49-F238E27FC236}">
                 <a16:creationId xmlns:a16="http://schemas.microsoft.com/office/drawing/2014/main" id="{C39614BC-5C6F-FCB6-8FA2-F3077E85F708}"/>
               </a:ext>
             </a:extLst>
@@ -6289,7 +6088,7 @@
 </p:sld>
 </file>
 
-<file path=ppt/slides/slide7.xml><?xml version="1.0" encoding="utf-8"?>
+<file path=ppt/slides/slide6.xml><?xml version="1.0" encoding="utf-8"?>
 <p:sld xmlns:a="http://schemas.openxmlformats.org/drawingml/2006/main" xmlns:r="http://schemas.openxmlformats.org/officeDocument/2006/relationships" xmlns:p="http://schemas.openxmlformats.org/presentationml/2006/main">
   <p:cSld>
     <p:spTree>
@@ -6382,7 +6181,7 @@
 </p:sld>
 </file>
 
-<file path=ppt/slides/slide8.xml><?xml version="1.0" encoding="utf-8"?>
+<file path=ppt/slides/slide7.xml><?xml version="1.0" encoding="utf-8"?>
 <p:sld xmlns:a="http://schemas.openxmlformats.org/drawingml/2006/main" xmlns:r="http://schemas.openxmlformats.org/officeDocument/2006/relationships" xmlns:p="http://schemas.openxmlformats.org/presentationml/2006/main">
   <p:cSld>
     <p:spTree>
@@ -6510,6 +6309,128 @@
 </p:sld>
 </file>
 
+<file path=ppt/slides/slide8.xml><?xml version="1.0" encoding="utf-8"?>
+<p:sld xmlns:a="http://schemas.openxmlformats.org/drawingml/2006/main" xmlns:r="http://schemas.openxmlformats.org/officeDocument/2006/relationships" xmlns:p="http://schemas.openxmlformats.org/presentationml/2006/main">
+  <p:cSld>
+    <p:spTree>
+      <p:nvGrpSpPr>
+        <p:cNvPr id="1" name=""/>
+        <p:cNvGrpSpPr/>
+        <p:nvPr/>
+      </p:nvGrpSpPr>
+      <p:grpSpPr>
+        <a:xfrm>
+          <a:off x="0" y="0"/>
+          <a:ext cx="0" cy="0"/>
+          <a:chOff x="0" y="0"/>
+          <a:chExt cx="0" cy="0"/>
+        </a:xfrm>
+      </p:grpSpPr>
+      <p:sp>
+        <p:nvSpPr>
+          <p:cNvPr id="2" name="Titre 1">
+            <a:extLst>
+              <a:ext uri="{FF2B5EF4-FFF2-40B4-BE49-F238E27FC236}">
+                <a16:creationId xmlns:a16="http://schemas.microsoft.com/office/drawing/2014/main" id="{5556111E-D22F-2536-605D-E799FDB80FB3}"/>
+              </a:ext>
+            </a:extLst>
+          </p:cNvPr>
+          <p:cNvSpPr>
+            <a:spLocks noGrp="1"/>
+          </p:cNvSpPr>
+          <p:nvPr>
+            <p:ph type="title"/>
+          </p:nvPr>
+        </p:nvSpPr>
+        <p:spPr/>
+        <p:txBody>
+          <a:bodyPr/>
+          <a:lstStyle/>
+          <a:p>
+            <a:r>
+              <a:rPr lang="fr-FR" dirty="0"/>
+              <a:t>BPTT</a:t>
+            </a:r>
+          </a:p>
+        </p:txBody>
+      </p:sp>
+      <p:sp>
+        <p:nvSpPr>
+          <p:cNvPr id="3" name="Espace réservé du contenu 2">
+            <a:extLst>
+              <a:ext uri="{FF2B5EF4-FFF2-40B4-BE49-F238E27FC236}">
+                <a16:creationId xmlns:a16="http://schemas.microsoft.com/office/drawing/2014/main" id="{4F621A35-C2DE-431E-2902-8C74858414D4}"/>
+              </a:ext>
+            </a:extLst>
+          </p:cNvPr>
+          <p:cNvSpPr>
+            <a:spLocks noGrp="1"/>
+          </p:cNvSpPr>
+          <p:nvPr>
+            <p:ph idx="1"/>
+          </p:nvPr>
+        </p:nvSpPr>
+        <p:spPr/>
+        <p:txBody>
+          <a:bodyPr/>
+          <a:lstStyle/>
+          <a:p>
+            <a:r>
+              <a:rPr lang="fr-FR" dirty="0"/>
+              <a:t>Les RNN utilisent des algorithmes de rétropropagation à travers le temps </a:t>
+            </a:r>
+            <a:r>
+              <a:rPr lang="fr-FR" dirty="0" err="1"/>
+              <a:t>Backpropagation</a:t>
+            </a:r>
+            <a:r>
+              <a:rPr lang="fr-FR" dirty="0"/>
+              <a:t> </a:t>
+            </a:r>
+            <a:r>
+              <a:rPr lang="fr-FR" dirty="0" err="1"/>
+              <a:t>Through</a:t>
+            </a:r>
+            <a:r>
+              <a:rPr lang="fr-FR" dirty="0"/>
+              <a:t> Time</a:t>
+            </a:r>
+          </a:p>
+          <a:p>
+            <a:r>
+              <a:rPr lang="fr-FR" dirty="0"/>
+              <a:t>Les principes de la BPTT sont les mêmes que ceux de la rétropropagation traditionnelle</a:t>
+            </a:r>
+          </a:p>
+          <a:p>
+            <a:pPr lvl="1"/>
+            <a:r>
+              <a:rPr lang="fr-FR" dirty="0"/>
+              <a:t>Le modèle s’entraîne lui-même en calculant les erreurs de sa couche de sortie à sa couche d’entrée</a:t>
+            </a:r>
+          </a:p>
+          <a:p>
+            <a:pPr lvl="1"/>
+            <a:r>
+              <a:rPr lang="fr-FR" dirty="0"/>
+              <a:t>La BPTT diffère de l’approche traditionnelle en ce sens qu’elle additionne les erreurs à chaque intervalle temporel, alors que les réseaux à propagation à action directe n’ont pas besoin d’additionner les erreurs, car ils ne partagent aucun paramètre sur chaque couche</a:t>
+            </a:r>
+          </a:p>
+        </p:txBody>
+      </p:sp>
+    </p:spTree>
+    <p:extLst>
+      <p:ext uri="{BB962C8B-B14F-4D97-AF65-F5344CB8AC3E}">
+        <p14:creationId xmlns:p14="http://schemas.microsoft.com/office/powerpoint/2010/main" val="3955419585"/>
+      </p:ext>
+    </p:extLst>
+  </p:cSld>
+  <p:clrMapOvr>
+    <a:masterClrMapping/>
+  </p:clrMapOvr>
+</p:sld>
+</file>
+
 <file path=ppt/slides/slide9.xml><?xml version="1.0" encoding="utf-8"?>
 <p:sld xmlns:a="http://schemas.openxmlformats.org/drawingml/2006/main" xmlns:r="http://schemas.openxmlformats.org/officeDocument/2006/relationships" xmlns:p="http://schemas.openxmlformats.org/presentationml/2006/main">
   <p:cSld>
@@ -6532,7 +6453,7 @@
           <p:cNvPr id="2" name="Titre 1">
             <a:extLst>
               <a:ext uri="{FF2B5EF4-FFF2-40B4-BE49-F238E27FC236}">
-                <a16:creationId xmlns:a16="http://schemas.microsoft.com/office/drawing/2014/main" id="{5556111E-D22F-2536-605D-E799FDB80FB3}"/>
+                <a16:creationId xmlns:a16="http://schemas.microsoft.com/office/drawing/2014/main" id="{EB631060-7A9E-1876-C3DB-E4987C949673}"/>
               </a:ext>
             </a:extLst>
           </p:cNvPr>
@@ -6549,9 +6470,10 @@
           <a:lstStyle/>
           <a:p>
             <a:r>
-              <a:rPr lang="fr-FR" dirty="0"/>
-              <a:t>BPTT</a:t>
-            </a:r>
+              <a:rPr lang="fr-FR" dirty="0" err="1"/>
+              <a:t>Enroullement</a:t>
+            </a:r>
+            <a:endParaRPr lang="fr-FR" dirty="0"/>
           </a:p>
         </p:txBody>
       </p:sp>
@@ -6560,7 +6482,7 @@
           <p:cNvPr id="3" name="Espace réservé du contenu 2">
             <a:extLst>
               <a:ext uri="{FF2B5EF4-FFF2-40B4-BE49-F238E27FC236}">
-                <a16:creationId xmlns:a16="http://schemas.microsoft.com/office/drawing/2014/main" id="{4F621A35-C2DE-431E-2902-8C74858414D4}"/>
+                <a16:creationId xmlns:a16="http://schemas.microsoft.com/office/drawing/2014/main" id="{D40F7CA6-B1E0-6681-23D7-B1A344FBEC98}"/>
               </a:ext>
             </a:extLst>
           </p:cNvPr>
@@ -6576,53 +6498,44 @@
           <a:bodyPr/>
           <a:lstStyle/>
           <a:p>
-            <a:r>
-              <a:rPr lang="fr-FR" dirty="0"/>
-              <a:t>Les RNN utilisent des algorithmes de rétropropagation à travers le temps </a:t>
-            </a:r>
-            <a:r>
-              <a:rPr lang="fr-FR" dirty="0" err="1"/>
-              <a:t>Backpropagation</a:t>
-            </a:r>
-            <a:r>
-              <a:rPr lang="fr-FR" dirty="0"/>
-              <a:t> </a:t>
-            </a:r>
-            <a:r>
-              <a:rPr lang="fr-FR" dirty="0" err="1"/>
-              <a:t>Through</a:t>
-            </a:r>
-            <a:r>
-              <a:rPr lang="fr-FR" dirty="0"/>
-              <a:t> Time</a:t>
-            </a:r>
-          </a:p>
-          <a:p>
-            <a:r>
-              <a:rPr lang="fr-FR" dirty="0"/>
-              <a:t>Les principes de la BPTT sont les mêmes que ceux de la rétropropagation traditionnelle</a:t>
-            </a:r>
-          </a:p>
-          <a:p>
-            <a:pPr lvl="1"/>
-            <a:r>
-              <a:rPr lang="fr-FR" dirty="0"/>
-              <a:t>Le modèle s’entraîne lui-même en calculant les erreurs de sa couche de sortie à sa couche d’entrée</a:t>
-            </a:r>
-          </a:p>
-          <a:p>
-            <a:pPr lvl="1"/>
-            <a:r>
-              <a:rPr lang="fr-FR" dirty="0"/>
-              <a:t>La BPTT diffère de l’approche traditionnelle en ce sens qu’elle additionne les erreurs à chaque intervalle temporel, alors que les réseaux à propagation à action directe n’ont pas besoin d’additionner les erreurs, car ils ne partagent aucun paramètre sur chaque couche</a:t>
-            </a:r>
-          </a:p>
-        </p:txBody>
-      </p:sp>
+            <a:endParaRPr lang="fr-FR"/>
+          </a:p>
+        </p:txBody>
+      </p:sp>
+      <p:pic>
+        <p:nvPicPr>
+          <p:cNvPr id="5" name="Image 4">
+            <a:extLst>
+              <a:ext uri="{FF2B5EF4-FFF2-40B4-BE49-F238E27FC236}">
+                <a16:creationId xmlns:a16="http://schemas.microsoft.com/office/drawing/2014/main" id="{03BEF8DF-4458-A8ED-30F1-1C88B932FA2E}"/>
+              </a:ext>
+            </a:extLst>
+          </p:cNvPr>
+          <p:cNvPicPr>
+            <a:picLocks noChangeAspect="1"/>
+          </p:cNvPicPr>
+          <p:nvPr/>
+        </p:nvPicPr>
+        <p:blipFill>
+          <a:blip r:embed="rId2"/>
+          <a:stretch>
+            <a:fillRect/>
+          </a:stretch>
+        </p:blipFill>
+        <p:spPr>
+          <a:xfrm>
+            <a:off x="1835696" y="2492896"/>
+            <a:ext cx="5908743" cy="3501088"/>
+          </a:xfrm>
+          <a:prstGeom prst="rect">
+            <a:avLst/>
+          </a:prstGeom>
+        </p:spPr>
+      </p:pic>
     </p:spTree>
     <p:extLst>
       <p:ext uri="{BB962C8B-B14F-4D97-AF65-F5344CB8AC3E}">
-        <p14:creationId xmlns:p14="http://schemas.microsoft.com/office/powerpoint/2010/main" val="3955419585"/>
+        <p14:creationId xmlns:p14="http://schemas.microsoft.com/office/powerpoint/2010/main" val="387333661"/>
       </p:ext>
     </p:extLst>
   </p:cSld>
